--- a/Great Is Thy Faithfulness-CH.pptx
+++ b/Great Is Thy Faithfulness-CH.pptx
@@ -265,7 +265,7 @@
           <a:p>
             <a:fld id="{E759A0DE-F190-5444-87AC-4719D5F20D15}" type="datetimeFigureOut">
               <a:rPr lang="en-US" smtClean="0"/>
-              <a:t>6/19/26</a:t>
+              <a:t>6/20/26</a:t>
             </a:fld>
             <a:endParaRPr lang="en-US"/>
           </a:p>
@@ -463,7 +463,7 @@
           <a:p>
             <a:fld id="{E759A0DE-F190-5444-87AC-4719D5F20D15}" type="datetimeFigureOut">
               <a:rPr lang="en-US" smtClean="0"/>
-              <a:t>6/19/26</a:t>
+              <a:t>6/20/26</a:t>
             </a:fld>
             <a:endParaRPr lang="en-US"/>
           </a:p>
@@ -671,7 +671,7 @@
           <a:p>
             <a:fld id="{E759A0DE-F190-5444-87AC-4719D5F20D15}" type="datetimeFigureOut">
               <a:rPr lang="en-US" smtClean="0"/>
-              <a:t>6/19/26</a:t>
+              <a:t>6/20/26</a:t>
             </a:fld>
             <a:endParaRPr lang="en-US"/>
           </a:p>
@@ -869,7 +869,7 @@
           <a:p>
             <a:fld id="{E759A0DE-F190-5444-87AC-4719D5F20D15}" type="datetimeFigureOut">
               <a:rPr lang="en-US" smtClean="0"/>
-              <a:t>6/19/26</a:t>
+              <a:t>6/20/26</a:t>
             </a:fld>
             <a:endParaRPr lang="en-US"/>
           </a:p>
@@ -1144,7 +1144,7 @@
           <a:p>
             <a:fld id="{E759A0DE-F190-5444-87AC-4719D5F20D15}" type="datetimeFigureOut">
               <a:rPr lang="en-US" smtClean="0"/>
-              <a:t>6/19/26</a:t>
+              <a:t>6/20/26</a:t>
             </a:fld>
             <a:endParaRPr lang="en-US"/>
           </a:p>
@@ -1409,7 +1409,7 @@
           <a:p>
             <a:fld id="{E759A0DE-F190-5444-87AC-4719D5F20D15}" type="datetimeFigureOut">
               <a:rPr lang="en-US" smtClean="0"/>
-              <a:t>6/19/26</a:t>
+              <a:t>6/20/26</a:t>
             </a:fld>
             <a:endParaRPr lang="en-US"/>
           </a:p>
@@ -1821,7 +1821,7 @@
           <a:p>
             <a:fld id="{E759A0DE-F190-5444-87AC-4719D5F20D15}" type="datetimeFigureOut">
               <a:rPr lang="en-US" smtClean="0"/>
-              <a:t>6/19/26</a:t>
+              <a:t>6/20/26</a:t>
             </a:fld>
             <a:endParaRPr lang="en-US"/>
           </a:p>
@@ -1962,7 +1962,7 @@
           <a:p>
             <a:fld id="{E759A0DE-F190-5444-87AC-4719D5F20D15}" type="datetimeFigureOut">
               <a:rPr lang="en-US" smtClean="0"/>
-              <a:t>6/19/26</a:t>
+              <a:t>6/20/26</a:t>
             </a:fld>
             <a:endParaRPr lang="en-US"/>
           </a:p>
@@ -2075,7 +2075,7 @@
           <a:p>
             <a:fld id="{E759A0DE-F190-5444-87AC-4719D5F20D15}" type="datetimeFigureOut">
               <a:rPr lang="en-US" smtClean="0"/>
-              <a:t>6/19/26</a:t>
+              <a:t>6/20/26</a:t>
             </a:fld>
             <a:endParaRPr lang="en-US"/>
           </a:p>
@@ -2386,7 +2386,7 @@
           <a:p>
             <a:fld id="{E759A0DE-F190-5444-87AC-4719D5F20D15}" type="datetimeFigureOut">
               <a:rPr lang="en-US" smtClean="0"/>
-              <a:t>6/19/26</a:t>
+              <a:t>6/20/26</a:t>
             </a:fld>
             <a:endParaRPr lang="en-US"/>
           </a:p>
@@ -2674,7 +2674,7 @@
           <a:p>
             <a:fld id="{E759A0DE-F190-5444-87AC-4719D5F20D15}" type="datetimeFigureOut">
               <a:rPr lang="en-US" smtClean="0"/>
-              <a:t>6/19/26</a:t>
+              <a:t>6/20/26</a:t>
             </a:fld>
             <a:endParaRPr lang="en-US"/>
           </a:p>
@@ -2915,7 +2915,7 @@
           <a:p>
             <a:fld id="{E759A0DE-F190-5444-87AC-4719D5F20D15}" type="datetimeFigureOut">
               <a:rPr lang="en-US" smtClean="0"/>
-              <a:t>6/19/26</a:t>
+              <a:t>6/20/26</a:t>
             </a:fld>
             <a:endParaRPr lang="en-US"/>
           </a:p>
@@ -3905,8 +3905,18 @@
                 <a:latin typeface="Avenir Medium" panose="02000503020000020003" pitchFamily="2" charset="0"/>
                 <a:ea typeface="Bodoni Ornaments" pitchFamily="2" charset="0"/>
               </a:rPr>
-              <a:t> </a:t>
-            </a:r>
+              <a:t>C   F  Am  G </a:t>
+            </a:r>
+          </a:p>
+          <a:p>
+            <a:pPr algn="l"/>
+            <a:endParaRPr lang="en-US" sz="3600" dirty="0">
+              <a:solidFill>
+                <a:srgbClr val="FFFF00"/>
+              </a:solidFill>
+              <a:latin typeface="Avenir Medium" panose="02000503020000020003" pitchFamily="2" charset="0"/>
+              <a:ea typeface="Bodoni Ornaments" pitchFamily="2" charset="0"/>
+            </a:endParaRPr>
           </a:p>
           <a:p>
             <a:pPr algn="l"/>
@@ -4613,7 +4623,7 @@
                 <a:latin typeface="Avenir Medium" panose="02000503020000020003" pitchFamily="2" charset="0"/>
                 <a:ea typeface="Bodoni Ornaments" pitchFamily="2" charset="0"/>
               </a:rPr>
-              <a:t>F                  C                  G               C     Am    F      G</a:t>
+              <a:t>F                  C                  G               C     F    Am      G</a:t>
             </a:r>
           </a:p>
           <a:p>
